--- a/docs/poster/variants/v27.pptx
+++ b/docs/poster/variants/v27.pptx
@@ -3631,6 +3631,90 @@
               </a:spcAft>
             </a:pPr>
             <a:r>
+              <a:rPr sz="6200" b="1">
+                <a:solidFill>
+                  <a:srgbClr val="1B7A55"/>
+                </a:solidFill>
+                <a:latin typeface="Arial"/>
+              </a:rPr>
+              <a:t>14</a:t>
+            </a:r>
+          </a:p>
+        </p:txBody>
+      </p:sp>
+      <p:sp>
+        <p:nvSpPr>
+          <p:cNvPr id="15" name="TextBox 14"/>
+          <p:cNvSpPr txBox="1"/>
+          <p:nvPr/>
+        </p:nvSpPr>
+        <p:spPr>
+          <a:xfrm>
+            <a:off x="731520" y="10999469"/>
+            <a:ext cx="20482560" cy="365760"/>
+          </a:xfrm>
+          <a:prstGeom prst="rect">
+            <a:avLst/>
+          </a:prstGeom>
+          <a:noFill/>
+        </p:spPr>
+        <p:txBody>
+          <a:bodyPr wrap="square" lIns="0" rIns="0" tIns="0" bIns="0">
+            <a:spAutoFit/>
+          </a:bodyPr>
+          <a:lstStyle/>
+          <a:p>
+            <a:pPr algn="l">
+              <a:lnSpc>
+                <a:spcPct val="122000"/>
+              </a:lnSpc>
+              <a:spcAft>
+                <a:spcPts val="600"/>
+              </a:spcAft>
+            </a:pPr>
+            <a:r>
+              <a:rPr sz="1500" b="0">
+                <a:solidFill>
+                  <a:srgbClr val="5C6B62"/>
+                </a:solidFill>
+                <a:latin typeface="Arial"/>
+              </a:rPr>
+              <a:t>analysis tools the planner can choose from</a:t>
+            </a:r>
+          </a:p>
+        </p:txBody>
+      </p:sp>
+      <p:sp>
+        <p:nvSpPr>
+          <p:cNvPr id="16" name="TextBox 15"/>
+          <p:cNvSpPr txBox="1"/>
+          <p:nvPr/>
+        </p:nvSpPr>
+        <p:spPr>
+          <a:xfrm>
+            <a:off x="731520" y="11454383"/>
+            <a:ext cx="20482560" cy="365760"/>
+          </a:xfrm>
+          <a:prstGeom prst="rect">
+            <a:avLst/>
+          </a:prstGeom>
+          <a:noFill/>
+        </p:spPr>
+        <p:txBody>
+          <a:bodyPr wrap="square" lIns="0" rIns="0" tIns="0" bIns="0">
+            <a:spAutoFit/>
+          </a:bodyPr>
+          <a:lstStyle/>
+          <a:p>
+            <a:pPr algn="l">
+              <a:lnSpc>
+                <a:spcPct val="95000"/>
+              </a:lnSpc>
+              <a:spcAft>
+                <a:spcPts val="0"/>
+              </a:spcAft>
+            </a:pPr>
+            <a:r>
               <a:rPr sz="3200" b="1">
                 <a:solidFill>
                   <a:srgbClr val="1F3D2B"/>
@@ -3644,13 +3728,13 @@
       </p:sp>
       <p:sp>
         <p:nvSpPr>
-          <p:cNvPr id="15" name="Rectangle 14"/>
+          <p:cNvPr id="17" name="Rectangle 16"/>
           <p:cNvSpPr/>
           <p:nvPr/>
         </p:nvSpPr>
         <p:spPr>
           <a:xfrm>
-            <a:off x="731520" y="10724641"/>
+            <a:off x="731520" y="11982703"/>
             <a:ext cx="20482560" cy="27432"/>
           </a:xfrm>
           <a:prstGeom prst="rect">
@@ -3688,13 +3772,13 @@
       </p:sp>
       <p:sp>
         <p:nvSpPr>
-          <p:cNvPr id="16" name="TextBox 15"/>
+          <p:cNvPr id="18" name="TextBox 17"/>
           <p:cNvSpPr txBox="1"/>
           <p:nvPr/>
         </p:nvSpPr>
         <p:spPr>
           <a:xfrm>
-            <a:off x="731520" y="11053825"/>
+            <a:off x="731520" y="12311887"/>
             <a:ext cx="20482560" cy="365760"/>
           </a:xfrm>
           <a:prstGeom prst="rect">
@@ -3730,13 +3814,13 @@
       </p:sp>
       <p:sp>
         <p:nvSpPr>
-          <p:cNvPr id="17" name="TextBox 16"/>
+          <p:cNvPr id="19" name="TextBox 18"/>
           <p:cNvSpPr txBox="1"/>
           <p:nvPr/>
         </p:nvSpPr>
         <p:spPr>
           <a:xfrm>
-            <a:off x="731520" y="12131293"/>
+            <a:off x="731520" y="13389355"/>
             <a:ext cx="20482560" cy="365760"/>
           </a:xfrm>
           <a:prstGeom prst="rect">
@@ -3759,6 +3843,90 @@
               </a:spcAft>
             </a:pPr>
             <a:r>
+              <a:rPr sz="6200" b="1">
+                <a:solidFill>
+                  <a:srgbClr val="1B7A55"/>
+                </a:solidFill>
+                <a:latin typeface="Arial"/>
+              </a:rPr>
+              <a:t>27</a:t>
+            </a:r>
+          </a:p>
+        </p:txBody>
+      </p:sp>
+      <p:sp>
+        <p:nvSpPr>
+          <p:cNvPr id="20" name="TextBox 19"/>
+          <p:cNvSpPr txBox="1"/>
+          <p:nvPr/>
+        </p:nvSpPr>
+        <p:spPr>
+          <a:xfrm>
+            <a:off x="731520" y="14192503"/>
+            <a:ext cx="20482560" cy="365760"/>
+          </a:xfrm>
+          <a:prstGeom prst="rect">
+            <a:avLst/>
+          </a:prstGeom>
+          <a:noFill/>
+        </p:spPr>
+        <p:txBody>
+          <a:bodyPr wrap="square" lIns="0" rIns="0" tIns="0" bIns="0">
+            <a:spAutoFit/>
+          </a:bodyPr>
+          <a:lstStyle/>
+          <a:p>
+            <a:pPr algn="l">
+              <a:lnSpc>
+                <a:spcPct val="122000"/>
+              </a:lnSpc>
+              <a:spcAft>
+                <a:spcPts val="600"/>
+              </a:spcAft>
+            </a:pPr>
+            <a:r>
+              <a:rPr sz="1500" b="0">
+                <a:solidFill>
+                  <a:srgbClr val="5C6B62"/>
+                </a:solidFill>
+                <a:latin typeface="Arial"/>
+              </a:rPr>
+              <a:t>distinct models trained, run, or rejected</a:t>
+            </a:r>
+          </a:p>
+        </p:txBody>
+      </p:sp>
+      <p:sp>
+        <p:nvSpPr>
+          <p:cNvPr id="21" name="TextBox 20"/>
+          <p:cNvSpPr txBox="1"/>
+          <p:nvPr/>
+        </p:nvSpPr>
+        <p:spPr>
+          <a:xfrm>
+            <a:off x="731520" y="14647417"/>
+            <a:ext cx="20482560" cy="365760"/>
+          </a:xfrm>
+          <a:prstGeom prst="rect">
+            <a:avLst/>
+          </a:prstGeom>
+          <a:noFill/>
+        </p:spPr>
+        <p:txBody>
+          <a:bodyPr wrap="square" lIns="0" rIns="0" tIns="0" bIns="0">
+            <a:spAutoFit/>
+          </a:bodyPr>
+          <a:lstStyle/>
+          <a:p>
+            <a:pPr algn="l">
+              <a:lnSpc>
+                <a:spcPct val="95000"/>
+              </a:lnSpc>
+              <a:spcAft>
+                <a:spcPts val="0"/>
+              </a:spcAft>
+            </a:pPr>
+            <a:r>
               <a:rPr sz="3200" b="1">
                 <a:solidFill>
                   <a:srgbClr val="1F3D2B"/>
@@ -3772,13 +3940,13 @@
       </p:sp>
       <p:sp>
         <p:nvSpPr>
-          <p:cNvPr id="18" name="Rectangle 17"/>
+          <p:cNvPr id="22" name="Rectangle 21"/>
           <p:cNvSpPr/>
           <p:nvPr/>
         </p:nvSpPr>
         <p:spPr>
           <a:xfrm>
-            <a:off x="731520" y="12659613"/>
+            <a:off x="731520" y="15175738"/>
             <a:ext cx="20482560" cy="27432"/>
           </a:xfrm>
           <a:prstGeom prst="rect">
@@ -3816,7 +3984,7 @@
       </p:sp>
       <p:pic>
         <p:nvPicPr>
-          <p:cNvPr id="19" name="Picture 18" descr="m_ledger.png"/>
+          <p:cNvPr id="23" name="Picture 22" descr="m_ledger.png"/>
           <p:cNvPicPr>
             <a:picLocks noChangeAspect="1"/>
           </p:cNvPicPr>
@@ -3830,7 +3998,7 @@
         </p:blipFill>
         <p:spPr>
           <a:xfrm>
-            <a:off x="731520" y="12988797"/>
+            <a:off x="731520" y="15504922"/>
             <a:ext cx="20482560" cy="3749040"/>
           </a:xfrm>
           <a:prstGeom prst="rect">
@@ -3840,13 +4008,13 @@
       </p:pic>
       <p:sp>
         <p:nvSpPr>
-          <p:cNvPr id="20" name="TextBox 19"/>
+          <p:cNvPr id="24" name="TextBox 23"/>
           <p:cNvSpPr txBox="1"/>
           <p:nvPr/>
         </p:nvSpPr>
         <p:spPr>
           <a:xfrm>
-            <a:off x="731520" y="16847565"/>
+            <a:off x="731520" y="19363690"/>
             <a:ext cx="20482560" cy="365760"/>
           </a:xfrm>
           <a:prstGeom prst="rect">
@@ -3882,13 +4050,13 @@
       </p:sp>
       <p:sp>
         <p:nvSpPr>
-          <p:cNvPr id="21" name="TextBox 20"/>
+          <p:cNvPr id="25" name="TextBox 24"/>
           <p:cNvSpPr txBox="1"/>
           <p:nvPr/>
         </p:nvSpPr>
         <p:spPr>
           <a:xfrm>
-            <a:off x="731520" y="17832831"/>
+            <a:off x="731520" y="20348956"/>
             <a:ext cx="20482560" cy="365760"/>
           </a:xfrm>
           <a:prstGeom prst="rect">
@@ -3924,13 +4092,13 @@
       </p:sp>
       <p:sp>
         <p:nvSpPr>
-          <p:cNvPr id="22" name="TextBox 21"/>
+          <p:cNvPr id="26" name="TextBox 25"/>
           <p:cNvSpPr txBox="1"/>
           <p:nvPr/>
         </p:nvSpPr>
         <p:spPr>
           <a:xfrm>
-            <a:off x="731520" y="18910300"/>
+            <a:off x="731520" y="21426424"/>
             <a:ext cx="20482560" cy="365760"/>
           </a:xfrm>
           <a:prstGeom prst="rect">
@@ -3966,13 +4134,13 @@
       </p:sp>
       <p:sp>
         <p:nvSpPr>
-          <p:cNvPr id="23" name="Rectangle 22"/>
+          <p:cNvPr id="27" name="Rectangle 26"/>
           <p:cNvSpPr/>
           <p:nvPr/>
         </p:nvSpPr>
         <p:spPr>
           <a:xfrm>
-            <a:off x="731520" y="19438620"/>
+            <a:off x="731520" y="21954744"/>
             <a:ext cx="20482560" cy="27432"/>
           </a:xfrm>
           <a:prstGeom prst="rect">
@@ -4010,13 +4178,13 @@
       </p:sp>
       <p:sp>
         <p:nvSpPr>
-          <p:cNvPr id="24" name="TextBox 23"/>
+          <p:cNvPr id="28" name="TextBox 27"/>
           <p:cNvSpPr txBox="1"/>
           <p:nvPr/>
         </p:nvSpPr>
         <p:spPr>
           <a:xfrm>
-            <a:off x="731520" y="19767804"/>
+            <a:off x="731520" y="22283928"/>
             <a:ext cx="20482560" cy="365760"/>
           </a:xfrm>
           <a:prstGeom prst="rect">
@@ -4052,13 +4220,13 @@
       </p:sp>
       <p:sp>
         <p:nvSpPr>
-          <p:cNvPr id="25" name="TextBox 24"/>
+          <p:cNvPr id="29" name="TextBox 28"/>
           <p:cNvSpPr txBox="1"/>
           <p:nvPr/>
         </p:nvSpPr>
         <p:spPr>
           <a:xfrm>
-            <a:off x="731520" y="20845272"/>
+            <a:off x="731520" y="23361396"/>
             <a:ext cx="20482560" cy="365760"/>
           </a:xfrm>
           <a:prstGeom prst="rect">
@@ -4081,6 +4249,90 @@
               </a:spcAft>
             </a:pPr>
             <a:r>
+              <a:rPr sz="6200" b="1">
+                <a:solidFill>
+                  <a:srgbClr val="1B7A55"/>
+                </a:solidFill>
+                <a:latin typeface="Arial"/>
+              </a:rPr>
+              <a:t>92</a:t>
+            </a:r>
+          </a:p>
+        </p:txBody>
+      </p:sp>
+      <p:sp>
+        <p:nvSpPr>
+          <p:cNvPr id="30" name="TextBox 29"/>
+          <p:cNvSpPr txBox="1"/>
+          <p:nvPr/>
+        </p:nvSpPr>
+        <p:spPr>
+          <a:xfrm>
+            <a:off x="731520" y="24164544"/>
+            <a:ext cx="20482560" cy="365760"/>
+          </a:xfrm>
+          <a:prstGeom prst="rect">
+            <a:avLst/>
+          </a:prstGeom>
+          <a:noFill/>
+        </p:spPr>
+        <p:txBody>
+          <a:bodyPr wrap="square" lIns="0" rIns="0" tIns="0" bIns="0">
+            <a:spAutoFit/>
+          </a:bodyPr>
+          <a:lstStyle/>
+          <a:p>
+            <a:pPr algn="l">
+              <a:lnSpc>
+                <a:spcPct val="122000"/>
+              </a:lnSpc>
+              <a:spcAft>
+                <a:spcPts val="600"/>
+              </a:spcAft>
+            </a:pPr>
+            <a:r>
+              <a:rPr sz="1500" b="0">
+                <a:solidFill>
+                  <a:srgbClr val="5C6B62"/>
+                </a:solidFill>
+                <a:latin typeface="Arial"/>
+              </a:rPr>
+              <a:t>questions asked of a dataset so far</a:t>
+            </a:r>
+          </a:p>
+        </p:txBody>
+      </p:sp>
+      <p:sp>
+        <p:nvSpPr>
+          <p:cNvPr id="31" name="TextBox 30"/>
+          <p:cNvSpPr txBox="1"/>
+          <p:nvPr/>
+        </p:nvSpPr>
+        <p:spPr>
+          <a:xfrm>
+            <a:off x="731520" y="24619458"/>
+            <a:ext cx="20482560" cy="365760"/>
+          </a:xfrm>
+          <a:prstGeom prst="rect">
+            <a:avLst/>
+          </a:prstGeom>
+          <a:noFill/>
+        </p:spPr>
+        <p:txBody>
+          <a:bodyPr wrap="square" lIns="0" rIns="0" tIns="0" bIns="0">
+            <a:spAutoFit/>
+          </a:bodyPr>
+          <a:lstStyle/>
+          <a:p>
+            <a:pPr algn="l">
+              <a:lnSpc>
+                <a:spcPct val="95000"/>
+              </a:lnSpc>
+              <a:spcAft>
+                <a:spcPts val="0"/>
+              </a:spcAft>
+            </a:pPr>
+            <a:r>
               <a:rPr sz="3200" b="1">
                 <a:solidFill>
                   <a:srgbClr val="1F3D2B"/>
@@ -4094,13 +4346,13 @@
       </p:sp>
       <p:sp>
         <p:nvSpPr>
-          <p:cNvPr id="26" name="Rectangle 25"/>
+          <p:cNvPr id="32" name="Rectangle 31"/>
           <p:cNvSpPr/>
           <p:nvPr/>
         </p:nvSpPr>
         <p:spPr>
           <a:xfrm>
-            <a:off x="731520" y="21373592"/>
+            <a:off x="731520" y="25147778"/>
             <a:ext cx="20482560" cy="27432"/>
           </a:xfrm>
           <a:prstGeom prst="rect">
@@ -4138,13 +4390,13 @@
       </p:sp>
       <p:sp>
         <p:nvSpPr>
-          <p:cNvPr id="27" name="TextBox 26"/>
+          <p:cNvPr id="33" name="TextBox 32"/>
           <p:cNvSpPr txBox="1"/>
           <p:nvPr/>
         </p:nvSpPr>
         <p:spPr>
           <a:xfrm>
-            <a:off x="731520" y="21702776"/>
+            <a:off x="731520" y="25476962"/>
             <a:ext cx="20482560" cy="365760"/>
           </a:xfrm>
           <a:prstGeom prst="rect">
@@ -4180,13 +4432,13 @@
       </p:sp>
       <p:sp>
         <p:nvSpPr>
-          <p:cNvPr id="28" name="TextBox 27"/>
+          <p:cNvPr id="34" name="TextBox 33"/>
           <p:cNvSpPr txBox="1"/>
           <p:nvPr/>
         </p:nvSpPr>
         <p:spPr>
           <a:xfrm>
-            <a:off x="731520" y="22780244"/>
+            <a:off x="731520" y="26554430"/>
             <a:ext cx="20482560" cy="365760"/>
           </a:xfrm>
           <a:prstGeom prst="rect">
@@ -4222,13 +4474,13 @@
       </p:sp>
       <p:sp>
         <p:nvSpPr>
-          <p:cNvPr id="29" name="Rectangle 28"/>
+          <p:cNvPr id="35" name="Rectangle 34"/>
           <p:cNvSpPr/>
           <p:nvPr/>
         </p:nvSpPr>
         <p:spPr>
           <a:xfrm>
-            <a:off x="731520" y="23308564"/>
+            <a:off x="731520" y="27082750"/>
             <a:ext cx="20482560" cy="27432"/>
           </a:xfrm>
           <a:prstGeom prst="rect">
@@ -4266,13 +4518,13 @@
       </p:sp>
       <p:sp>
         <p:nvSpPr>
-          <p:cNvPr id="30" name="TextBox 29"/>
+          <p:cNvPr id="36" name="TextBox 35"/>
           <p:cNvSpPr txBox="1"/>
           <p:nvPr/>
         </p:nvSpPr>
         <p:spPr>
           <a:xfrm>
-            <a:off x="731520" y="23637748"/>
+            <a:off x="731520" y="27411934"/>
             <a:ext cx="20482560" cy="365760"/>
           </a:xfrm>
           <a:prstGeom prst="rect">
@@ -4308,13 +4560,13 @@
       </p:sp>
       <p:sp>
         <p:nvSpPr>
-          <p:cNvPr id="31" name="TextBox 30"/>
+          <p:cNvPr id="37" name="TextBox 36"/>
           <p:cNvSpPr txBox="1"/>
           <p:nvPr/>
         </p:nvSpPr>
         <p:spPr>
           <a:xfrm>
-            <a:off x="731520" y="24715216"/>
+            <a:off x="22677120" y="6031992"/>
             <a:ext cx="20482560" cy="365760"/>
           </a:xfrm>
           <a:prstGeom prst="rect">
@@ -4343,20 +4595,20 @@
                 </a:solidFill>
                 <a:latin typeface="Arial"/>
               </a:rPr>
-              <a:t>Adding the next robot</a:t>
-            </a:r>
-          </a:p>
-        </p:txBody>
-      </p:sp>
-      <p:sp>
-        <p:nvSpPr>
-          <p:cNvPr id="32" name="Rectangle 31"/>
+              <a:t>Robots on the platform today</a:t>
+            </a:r>
+          </a:p>
+        </p:txBody>
+      </p:sp>
+      <p:sp>
+        <p:nvSpPr>
+          <p:cNvPr id="38" name="Rectangle 37"/>
           <p:cNvSpPr/>
           <p:nvPr/>
         </p:nvSpPr>
         <p:spPr>
           <a:xfrm>
-            <a:off x="731520" y="25243536"/>
+            <a:off x="22677120" y="6560312"/>
             <a:ext cx="20482560" cy="27432"/>
           </a:xfrm>
           <a:prstGeom prst="rect">
@@ -4394,13 +4646,13 @@
       </p:sp>
       <p:sp>
         <p:nvSpPr>
-          <p:cNvPr id="33" name="TextBox 32"/>
+          <p:cNvPr id="39" name="TextBox 38"/>
           <p:cNvSpPr txBox="1"/>
           <p:nvPr/>
         </p:nvSpPr>
         <p:spPr>
           <a:xfrm>
-            <a:off x="731520" y="25572720"/>
+            <a:off x="22677120" y="6889496"/>
             <a:ext cx="20482560" cy="365760"/>
           </a:xfrm>
           <a:prstGeom prst="rect">
@@ -4429,20 +4681,20 @@
                 </a:solidFill>
                 <a:latin typeface="Arial"/>
               </a:rPr>
-              <a:t>A new robot needs a project, an API key and a session start. The ingest contract is the same for every vehicle: start a session, post sensor batches and frames while driving, stop. The platform does not care what the robot is. The Unitree humanoid's project exists on this basis and is waiting on its first upload.</a:t>
-            </a:r>
-          </a:p>
-        </p:txBody>
-      </p:sp>
-      <p:sp>
-        <p:nvSpPr>
-          <p:cNvPr id="34" name="TextBox 33"/>
+              <a:t>Robot 241 is a tracked rover that drives crop rows and streams camera, GPS and two IMUs. The laser cart carries the weeder: a galvanometer laser, a down camera over the work zone and a forward camera. Ten projects sit on the platform and two of them have a robot reporting into them. Between those two vehicles, 2,686 frames in 26 drives.</a:t>
+            </a:r>
+          </a:p>
+        </p:txBody>
+      </p:sp>
+      <p:sp>
+        <p:nvSpPr>
+          <p:cNvPr id="40" name="TextBox 39"/>
           <p:cNvSpPr txBox="1"/>
           <p:nvPr/>
         </p:nvSpPr>
         <p:spPr>
           <a:xfrm>
-            <a:off x="731520" y="26650188"/>
+            <a:off x="22677120" y="7966964"/>
             <a:ext cx="20482560" cy="365760"/>
           </a:xfrm>
           <a:prstGeom prst="rect">
@@ -4465,26 +4717,110 @@
               </a:spcAft>
             </a:pPr>
             <a:r>
-              <a:rPr sz="3200" b="1">
-                <a:solidFill>
-                  <a:srgbClr val="1F3D2B"/>
+              <a:rPr sz="6200" b="1">
+                <a:solidFill>
+                  <a:srgbClr val="1B7A55"/>
                 </a:solidFill>
                 <a:latin typeface="Arial"/>
               </a:rPr>
-              <a:t>Code the agent writes runs fenced in</a:t>
-            </a:r>
-          </a:p>
-        </p:txBody>
-      </p:sp>
-      <p:sp>
-        <p:nvSpPr>
-          <p:cNvPr id="35" name="Rectangle 34"/>
+              <a:t>1,389</a:t>
+            </a:r>
+          </a:p>
+        </p:txBody>
+      </p:sp>
+      <p:sp>
+        <p:nvSpPr>
+          <p:cNvPr id="41" name="TextBox 40"/>
+          <p:cNvSpPr txBox="1"/>
+          <p:nvPr/>
+        </p:nvSpPr>
+        <p:spPr>
+          <a:xfrm>
+            <a:off x="22677120" y="8770112"/>
+            <a:ext cx="20482560" cy="365760"/>
+          </a:xfrm>
+          <a:prstGeom prst="rect">
+            <a:avLst/>
+          </a:prstGeom>
+          <a:noFill/>
+        </p:spPr>
+        <p:txBody>
+          <a:bodyPr wrap="square" lIns="0" rIns="0" tIns="0" bIns="0">
+            <a:spAutoFit/>
+          </a:bodyPr>
+          <a:lstStyle/>
+          <a:p>
+            <a:pPr algn="l">
+              <a:lnSpc>
+                <a:spcPct val="122000"/>
+              </a:lnSpc>
+              <a:spcAft>
+                <a:spcPts val="600"/>
+              </a:spcAft>
+            </a:pPr>
+            <a:r>
+              <a:rPr sz="1500" b="0">
+                <a:solidFill>
+                  <a:srgbClr val="5C6B62"/>
+                </a:solidFill>
+                <a:latin typeface="Arial"/>
+              </a:rPr>
+              <a:t>joystick commands through the platform</a:t>
+            </a:r>
+          </a:p>
+        </p:txBody>
+      </p:sp>
+      <p:sp>
+        <p:nvSpPr>
+          <p:cNvPr id="42" name="TextBox 41"/>
+          <p:cNvSpPr txBox="1"/>
+          <p:nvPr/>
+        </p:nvSpPr>
+        <p:spPr>
+          <a:xfrm>
+            <a:off x="22677120" y="9225026"/>
+            <a:ext cx="20482560" cy="365760"/>
+          </a:xfrm>
+          <a:prstGeom prst="rect">
+            <a:avLst/>
+          </a:prstGeom>
+          <a:noFill/>
+        </p:spPr>
+        <p:txBody>
+          <a:bodyPr wrap="square" lIns="0" rIns="0" tIns="0" bIns="0">
+            <a:spAutoFit/>
+          </a:bodyPr>
+          <a:lstStyle/>
+          <a:p>
+            <a:pPr algn="l">
+              <a:lnSpc>
+                <a:spcPct val="95000"/>
+              </a:lnSpc>
+              <a:spcAft>
+                <a:spcPts val="0"/>
+              </a:spcAft>
+            </a:pPr>
+            <a:r>
+              <a:rPr sz="3200" b="1">
+                <a:solidFill>
+                  <a:srgbClr val="1F3D2B"/>
+                </a:solidFill>
+                <a:latin typeface="Arial"/>
+              </a:rPr>
+              <a:t>Driving a robot from a browser</a:t>
+            </a:r>
+          </a:p>
+        </p:txBody>
+      </p:sp>
+      <p:sp>
+        <p:nvSpPr>
+          <p:cNvPr id="43" name="Rectangle 42"/>
           <p:cNvSpPr/>
           <p:nvPr/>
         </p:nvSpPr>
         <p:spPr>
           <a:xfrm>
-            <a:off x="731520" y="27178508"/>
+            <a:off x="22677120" y="9753346"/>
             <a:ext cx="20482560" cy="27432"/>
           </a:xfrm>
           <a:prstGeom prst="rect">
@@ -4522,13 +4858,13 @@
       </p:sp>
       <p:sp>
         <p:nvSpPr>
-          <p:cNvPr id="36" name="TextBox 35"/>
+          <p:cNvPr id="44" name="TextBox 43"/>
           <p:cNvSpPr txBox="1"/>
           <p:nvPr/>
         </p:nvSpPr>
         <p:spPr>
           <a:xfrm>
-            <a:off x="731520" y="27507692"/>
+            <a:off x="22677120" y="10082530"/>
             <a:ext cx="20482560" cy="365760"/>
           </a:xfrm>
           <a:prstGeom prst="rect">
@@ -4557,20 +4893,20 @@
                 </a:solidFill>
                 <a:latin typeface="Arial"/>
               </a:rPr>
-              <a:t>Generated code passes an import whitelist and an AST check before it runs, with no network and no file writes, 15 seconds of CPU, 1.5 GB of memory and a 25 second wall clock. A user can edit the agent's code or paste their own and re-run it in the same fence.</a:t>
-            </a:r>
-          </a:p>
-        </p:txBody>
-      </p:sp>
-      <p:sp>
-        <p:nvSpPr>
-          <p:cNvPr id="37" name="TextBox 36"/>
+              <a:t>A signed-in user opens the 241 project and clicks Drive. The platform reverse-proxies the robot's own console over the lab tailnet, so the rover is driven from a plain browser with no VPN client. 1,389 joystick commands have gone through that path. Two gates sit in front of it: the platform's Google login, then the robot's own password.</a:t>
+            </a:r>
+          </a:p>
+        </p:txBody>
+      </p:sp>
+      <p:sp>
+        <p:nvSpPr>
+          <p:cNvPr id="45" name="TextBox 44"/>
           <p:cNvSpPr txBox="1"/>
           <p:nvPr/>
         </p:nvSpPr>
         <p:spPr>
           <a:xfrm>
-            <a:off x="22677120" y="6031992"/>
+            <a:off x="22677120" y="11159998"/>
             <a:ext cx="20482560" cy="365760"/>
           </a:xfrm>
           <a:prstGeom prst="rect">
@@ -4599,20 +4935,20 @@
                 </a:solidFill>
                 <a:latin typeface="Arial"/>
               </a:rPr>
-              <a:t>Robots on the platform today</a:t>
-            </a:r>
-          </a:p>
-        </p:txBody>
-      </p:sp>
-      <p:sp>
-        <p:nvSpPr>
-          <p:cNvPr id="38" name="Rectangle 37"/>
+              <a:t>Left alone for fifteen rounds</a:t>
+            </a:r>
+          </a:p>
+        </p:txBody>
+      </p:sp>
+      <p:sp>
+        <p:nvSpPr>
+          <p:cNvPr id="46" name="Rectangle 45"/>
           <p:cNvSpPr/>
           <p:nvPr/>
         </p:nvSpPr>
         <p:spPr>
           <a:xfrm>
-            <a:off x="22677120" y="6560312"/>
+            <a:off x="22677120" y="11688317"/>
             <a:ext cx="20482560" cy="27432"/>
           </a:xfrm>
           <a:prstGeom prst="rect">
@@ -4648,15 +4984,81 @@
           </a:p>
         </p:txBody>
       </p:sp>
-      <p:sp>
-        <p:nvSpPr>
-          <p:cNvPr id="39" name="TextBox 38"/>
+      <p:pic>
+        <p:nvPicPr>
+          <p:cNvPr id="47" name="Picture 46" descr="f_rounds.png"/>
+          <p:cNvPicPr>
+            <a:picLocks noChangeAspect="1"/>
+          </p:cNvPicPr>
+          <p:nvPr/>
+        </p:nvPicPr>
+        <p:blipFill>
+          <a:blip r:embed="rId3"/>
+          <a:stretch>
+            <a:fillRect/>
+          </a:stretch>
+        </p:blipFill>
+        <p:spPr>
+          <a:xfrm>
+            <a:off x="22677120" y="12017501"/>
+            <a:ext cx="20482560" cy="4663440"/>
+          </a:xfrm>
+          <a:prstGeom prst="rect">
+            <a:avLst/>
+          </a:prstGeom>
+        </p:spPr>
+      </p:pic>
+      <p:sp>
+        <p:nvSpPr>
+          <p:cNvPr id="48" name="TextBox 47"/>
           <p:cNvSpPr txBox="1"/>
           <p:nvPr/>
         </p:nvSpPr>
         <p:spPr>
           <a:xfrm>
-            <a:off x="22677120" y="6889496"/>
+            <a:off x="22677120" y="16790670"/>
+            <a:ext cx="20482560" cy="365760"/>
+          </a:xfrm>
+          <a:prstGeom prst="rect">
+            <a:avLst/>
+          </a:prstGeom>
+          <a:noFill/>
+        </p:spPr>
+        <p:txBody>
+          <a:bodyPr wrap="square" lIns="0" rIns="0" tIns="0" bIns="0">
+            <a:spAutoFit/>
+          </a:bodyPr>
+          <a:lstStyle/>
+          <a:p>
+            <a:pPr algn="l">
+              <a:lnSpc>
+                <a:spcPct val="118000"/>
+              </a:lnSpc>
+              <a:spcAft>
+                <a:spcPts val="0"/>
+              </a:spcAft>
+            </a:pPr>
+            <a:r>
+              <a:rPr sz="1500" b="0">
+                <a:solidFill>
+                  <a:srgbClr val="5C6B62"/>
+                </a:solidFill>
+                <a:latin typeface="Arial"/>
+              </a:rPr>
+              <a:t>Figure 2.  (f) Fifteen unattended rounds on a fixed holdout. (g) Round 15's exact dataset, three ways. The first two marks differ only in the starting weights, so their gap is the warm-start chain; the third is the recipe the campaign ran, whose wall-clock cap truncates the cosine, with its three seeds drawn behind it. Sigma throughout is that recipe's own seed spread, 0.0040 over three seeds, propagated to the difference being quoted. Completing the schedule is not the fix -- the second mark sits below the third.</a:t>
+            </a:r>
+          </a:p>
+        </p:txBody>
+      </p:sp>
+      <p:sp>
+        <p:nvSpPr>
+          <p:cNvPr id="49" name="TextBox 48"/>
+          <p:cNvSpPr txBox="1"/>
+          <p:nvPr/>
+        </p:nvSpPr>
+        <p:spPr>
+          <a:xfrm>
+            <a:off x="22677120" y="17775936"/>
             <a:ext cx="20482560" cy="365760"/>
           </a:xfrm>
           <a:prstGeom prst="rect">
@@ -4685,20 +5087,20 @@
                 </a:solidFill>
                 <a:latin typeface="Arial"/>
               </a:rPr>
-              <a:t>Robot 241 is a tracked rover that drives crop rows and streams camera, GPS and two IMUs. The laser cart carries the weeder: a galvanometer laser, a down camera over the work zone and a forward camera. A Unitree humanoid has a project and has uploaded nothing yet. Between them the two ground vehicles have recorded 2,686 frames in 26 drives.</a:t>
-            </a:r>
-          </a:p>
-        </p:txBody>
-      </p:sp>
-      <p:sp>
-        <p:nvSpPr>
-          <p:cNvPr id="40" name="TextBox 39"/>
+              <a:t>Two cluster jobs, one collecting and one training, ran fifteen rounds against the locked registry with nobody in the room. Each round searched public sources, filtered what it found, merged, trained and evaluated. Every round reported success. Accuracy fell for fifteen rounds. This part is built and is switched off today.</a:t>
+            </a:r>
+          </a:p>
+        </p:txBody>
+      </p:sp>
+      <p:sp>
+        <p:nvSpPr>
+          <p:cNvPr id="50" name="TextBox 49"/>
           <p:cNvSpPr txBox="1"/>
           <p:nvPr/>
         </p:nvSpPr>
         <p:spPr>
           <a:xfrm>
-            <a:off x="22677120" y="8261349"/>
+            <a:off x="22677120" y="18853404"/>
             <a:ext cx="20482560" cy="365760"/>
           </a:xfrm>
           <a:prstGeom prst="rect">
@@ -4727,20 +5129,20 @@
                 </a:solidFill>
                 <a:latin typeface="Arial"/>
               </a:rPr>
-              <a:t>Driving a robot from a browser</a:t>
-            </a:r>
-          </a:p>
-        </p:txBody>
-      </p:sp>
-      <p:sp>
-        <p:nvSpPr>
-          <p:cNvPr id="41" name="Rectangle 40"/>
+              <a:t>Inside the platform</a:t>
+            </a:r>
+          </a:p>
+        </p:txBody>
+      </p:sp>
+      <p:sp>
+        <p:nvSpPr>
+          <p:cNvPr id="51" name="Rectangle 50"/>
           <p:cNvSpPr/>
           <p:nvPr/>
         </p:nvSpPr>
         <p:spPr>
           <a:xfrm>
-            <a:off x="22677120" y="8789669"/>
+            <a:off x="22677120" y="19381724"/>
             <a:ext cx="20482560" cy="27432"/>
           </a:xfrm>
           <a:prstGeom prst="rect">
@@ -4776,15 +5178,81 @@
           </a:p>
         </p:txBody>
       </p:sp>
-      <p:sp>
-        <p:nvSpPr>
-          <p:cNvPr id="42" name="TextBox 41"/>
+      <p:pic>
+        <p:nvPicPr>
+          <p:cNvPr id="52" name="Picture 51" descr="n_system.png"/>
+          <p:cNvPicPr>
+            <a:picLocks noChangeAspect="1"/>
+          </p:cNvPicPr>
+          <p:nvPr/>
+        </p:nvPicPr>
+        <p:blipFill>
+          <a:blip r:embed="rId4"/>
+          <a:stretch>
+            <a:fillRect/>
+          </a:stretch>
+        </p:blipFill>
+        <p:spPr>
+          <a:xfrm>
+            <a:off x="22677120" y="19710908"/>
+            <a:ext cx="20482560" cy="3383280"/>
+          </a:xfrm>
+          <a:prstGeom prst="rect">
+            <a:avLst/>
+          </a:prstGeom>
+        </p:spPr>
+      </p:pic>
+      <p:sp>
+        <p:nvSpPr>
+          <p:cNvPr id="53" name="TextBox 52"/>
           <p:cNvSpPr txBox="1"/>
           <p:nvPr/>
         </p:nvSpPr>
         <p:spPr>
           <a:xfrm>
-            <a:off x="22677120" y="9118853"/>
+            <a:off x="22677120" y="23203916"/>
+            <a:ext cx="20482560" cy="365760"/>
+          </a:xfrm>
+          <a:prstGeom prst="rect">
+            <a:avLst/>
+          </a:prstGeom>
+          <a:noFill/>
+        </p:spPr>
+        <p:txBody>
+          <a:bodyPr wrap="square" lIns="0" rIns="0" tIns="0" bIns="0">
+            <a:spAutoFit/>
+          </a:bodyPr>
+          <a:lstStyle/>
+          <a:p>
+            <a:pPr algn="l">
+              <a:lnSpc>
+                <a:spcPct val="118000"/>
+              </a:lnSpc>
+              <a:spcAft>
+                <a:spcPts val="0"/>
+              </a:spcAft>
+            </a:pPr>
+            <a:r>
+              <a:rPr sz="1500" b="0">
+                <a:solidFill>
+                  <a:srgbClr val="5C6B62"/>
+                </a:solidFill>
+                <a:latin typeface="Arial"/>
+              </a:rPr>
+              <a:t>Figure 3.  The path as built, from a camera in a crop row to a checkpoint on the cluster. Every stage has run. Three qualifications ride on it. The collector and trainer are paused after a stop-loss on 2026-08-29. The supervisor is advisory and nothing it says is applied. And the last link is not closed: no robot frame has entered training, because none of them is labelled yet.</a:t>
+            </a:r>
+          </a:p>
+        </p:txBody>
+      </p:sp>
+      <p:sp>
+        <p:nvSpPr>
+          <p:cNvPr id="54" name="TextBox 53"/>
+          <p:cNvSpPr txBox="1"/>
+          <p:nvPr/>
+        </p:nvSpPr>
+        <p:spPr>
+          <a:xfrm>
+            <a:off x="22677120" y="23964392"/>
             <a:ext cx="20482560" cy="365760"/>
           </a:xfrm>
           <a:prstGeom prst="rect">
@@ -4813,20 +5281,20 @@
                 </a:solidFill>
                 <a:latin typeface="Arial"/>
               </a:rPr>
-              <a:t>A signed-in user opens the 241 project and clicks Drive. The platform reverse-proxies the robot's own console over the lab tailnet, so the rover is driven from a plain browser with no VPN client. 1,389 joystick commands have gone through that path. Two gates sit in front of it: the platform's Google login, then the robot's own password.</a:t>
-            </a:r>
-          </a:p>
-        </p:txBody>
-      </p:sp>
-      <p:sp>
-        <p:nvSpPr>
-          <p:cNvPr id="43" name="TextBox 42"/>
+              <a:t>Every stage from a camera in a crop row to a checkpoint on the cluster has run. The dashboard and registry run on a lab server; GPU jobs queue on PSC Bridges-2. The collector and trainer are paused after a stop-loss on 2026-08-29. The supervisor is advisory and nothing it says is applied.</a:t>
+            </a:r>
+          </a:p>
+        </p:txBody>
+      </p:sp>
+      <p:sp>
+        <p:nvSpPr>
+          <p:cNvPr id="55" name="TextBox 54"/>
           <p:cNvSpPr txBox="1"/>
           <p:nvPr/>
         </p:nvSpPr>
         <p:spPr>
           <a:xfrm>
-            <a:off x="22677120" y="10196321"/>
+            <a:off x="22677120" y="25041860"/>
             <a:ext cx="20482560" cy="365760"/>
           </a:xfrm>
           <a:prstGeom prst="rect">
@@ -4855,20 +5323,20 @@
                 </a:solidFill>
                 <a:latin typeface="Arial"/>
               </a:rPr>
-              <a:t>Left alone for fifteen rounds</a:t>
-            </a:r>
-          </a:p>
-        </p:txBody>
-      </p:sp>
-      <p:sp>
-        <p:nvSpPr>
-          <p:cNvPr id="44" name="Rectangle 43"/>
+              <a:t>Only one robot has the button</a:t>
+            </a:r>
+          </a:p>
+        </p:txBody>
+      </p:sp>
+      <p:sp>
+        <p:nvSpPr>
+          <p:cNvPr id="56" name="Rectangle 55"/>
           <p:cNvSpPr/>
           <p:nvPr/>
         </p:nvSpPr>
         <p:spPr>
           <a:xfrm>
-            <a:off x="22677120" y="10724641"/>
+            <a:off x="22677120" y="25570180"/>
             <a:ext cx="20482560" cy="27432"/>
           </a:xfrm>
           <a:prstGeom prst="rect">
@@ -4904,81 +5372,15 @@
           </a:p>
         </p:txBody>
       </p:sp>
-      <p:pic>
-        <p:nvPicPr>
-          <p:cNvPr id="45" name="Picture 44" descr="f_rounds.png"/>
-          <p:cNvPicPr>
-            <a:picLocks noChangeAspect="1"/>
-          </p:cNvPicPr>
-          <p:nvPr/>
-        </p:nvPicPr>
-        <p:blipFill>
-          <a:blip r:embed="rId3"/>
-          <a:stretch>
-            <a:fillRect/>
-          </a:stretch>
-        </p:blipFill>
-        <p:spPr>
-          <a:xfrm>
-            <a:off x="22677120" y="11053825"/>
-            <a:ext cx="20482560" cy="4663440"/>
-          </a:xfrm>
-          <a:prstGeom prst="rect">
-            <a:avLst/>
-          </a:prstGeom>
-        </p:spPr>
-      </p:pic>
-      <p:sp>
-        <p:nvSpPr>
-          <p:cNvPr id="46" name="TextBox 45"/>
+      <p:sp>
+        <p:nvSpPr>
+          <p:cNvPr id="57" name="TextBox 56"/>
           <p:cNvSpPr txBox="1"/>
           <p:nvPr/>
         </p:nvSpPr>
         <p:spPr>
           <a:xfrm>
-            <a:off x="22677120" y="15826993"/>
-            <a:ext cx="20482560" cy="365760"/>
-          </a:xfrm>
-          <a:prstGeom prst="rect">
-            <a:avLst/>
-          </a:prstGeom>
-          <a:noFill/>
-        </p:spPr>
-        <p:txBody>
-          <a:bodyPr wrap="square" lIns="0" rIns="0" tIns="0" bIns="0">
-            <a:spAutoFit/>
-          </a:bodyPr>
-          <a:lstStyle/>
-          <a:p>
-            <a:pPr algn="l">
-              <a:lnSpc>
-                <a:spcPct val="118000"/>
-              </a:lnSpc>
-              <a:spcAft>
-                <a:spcPts val="0"/>
-              </a:spcAft>
-            </a:pPr>
-            <a:r>
-              <a:rPr sz="1500" b="0">
-                <a:solidFill>
-                  <a:srgbClr val="5C6B62"/>
-                </a:solidFill>
-                <a:latin typeface="Arial"/>
-              </a:rPr>
-              <a:t>Figure 2.  (f) Fifteen unattended rounds on a fixed holdout. (g) Round 15's exact dataset, three ways. The first two marks differ only in the starting weights, so their gap is the warm-start chain; the third is the recipe the campaign ran, whose wall-clock cap truncates the cosine, with its three seeds drawn behind it. Sigma throughout is that recipe's own seed spread, 0.0040 over three seeds, propagated to the difference being quoted. Completing the schedule is not the fix -- the second mark sits below the third.</a:t>
-            </a:r>
-          </a:p>
-        </p:txBody>
-      </p:sp>
-      <p:sp>
-        <p:nvSpPr>
-          <p:cNvPr id="47" name="TextBox 46"/>
-          <p:cNvSpPr txBox="1"/>
-          <p:nvPr/>
-        </p:nvSpPr>
-        <p:spPr>
-          <a:xfrm>
-            <a:off x="22677120" y="16812260"/>
+            <a:off x="22677120" y="25899364"/>
             <a:ext cx="20482560" cy="365760"/>
           </a:xfrm>
           <a:prstGeom prst="rect">
@@ -5007,20 +5409,20 @@
                 </a:solidFill>
                 <a:latin typeface="Arial"/>
               </a:rPr>
-              <a:t>Two cluster jobs, one collecting and one training, ran fifteen rounds against the locked registry with nobody in the room. Each round searched public sources, filtered what it found, merged, trained and evaluated. Every round reported success. Accuracy fell for fifteen rounds. This part is built and is switched off today.</a:t>
-            </a:r>
-          </a:p>
-        </p:txBody>
-      </p:sp>
-      <p:sp>
-        <p:nvSpPr>
-          <p:cNvPr id="48" name="TextBox 47"/>
+              <a:t>The Drive button appears on the 241 project and not on the laser cart's, because the allow-list holds one target. The rover has been dark since 2026-08-28: the platform answers a drive request today with its own offline page. The cart has never been drivable from the platform.</a:t>
+            </a:r>
+          </a:p>
+        </p:txBody>
+      </p:sp>
+      <p:sp>
+        <p:nvSpPr>
+          <p:cNvPr id="58" name="TextBox 57"/>
           <p:cNvSpPr txBox="1"/>
           <p:nvPr/>
         </p:nvSpPr>
         <p:spPr>
           <a:xfrm>
-            <a:off x="22677120" y="17889728"/>
+            <a:off x="22677120" y="26976832"/>
             <a:ext cx="20482560" cy="365760"/>
           </a:xfrm>
           <a:prstGeom prst="rect">
@@ -5049,20 +5451,20 @@
                 </a:solidFill>
                 <a:latin typeface="Arial"/>
               </a:rPr>
-              <a:t>Inside the platform</a:t>
-            </a:r>
-          </a:p>
-        </p:txBody>
-      </p:sp>
-      <p:sp>
-        <p:nvSpPr>
-          <p:cNvPr id="49" name="Rectangle 48"/>
+              <a:t>Which decisions a model makes</a:t>
+            </a:r>
+          </a:p>
+        </p:txBody>
+      </p:sp>
+      <p:sp>
+        <p:nvSpPr>
+          <p:cNvPr id="59" name="Rectangle 58"/>
           <p:cNvSpPr/>
           <p:nvPr/>
         </p:nvSpPr>
         <p:spPr>
           <a:xfrm>
-            <a:off x="22677120" y="18418048"/>
+            <a:off x="22677120" y="27505152"/>
             <a:ext cx="20482560" cy="27432"/>
           </a:xfrm>
           <a:prstGeom prst="rect">
@@ -5098,81 +5500,15 @@
           </a:p>
         </p:txBody>
       </p:sp>
-      <p:pic>
-        <p:nvPicPr>
-          <p:cNvPr id="50" name="Picture 49" descr="n_system.png"/>
-          <p:cNvPicPr>
-            <a:picLocks noChangeAspect="1"/>
-          </p:cNvPicPr>
-          <p:nvPr/>
-        </p:nvPicPr>
-        <p:blipFill>
-          <a:blip r:embed="rId4"/>
-          <a:stretch>
-            <a:fillRect/>
-          </a:stretch>
-        </p:blipFill>
-        <p:spPr>
-          <a:xfrm>
-            <a:off x="22677120" y="18747232"/>
-            <a:ext cx="20482560" cy="3383280"/>
-          </a:xfrm>
-          <a:prstGeom prst="rect">
-            <a:avLst/>
-          </a:prstGeom>
-        </p:spPr>
-      </p:pic>
-      <p:sp>
-        <p:nvSpPr>
-          <p:cNvPr id="51" name="TextBox 50"/>
+      <p:sp>
+        <p:nvSpPr>
+          <p:cNvPr id="60" name="TextBox 59"/>
           <p:cNvSpPr txBox="1"/>
           <p:nvPr/>
         </p:nvSpPr>
         <p:spPr>
           <a:xfrm>
-            <a:off x="22677120" y="22240240"/>
-            <a:ext cx="20482560" cy="365760"/>
-          </a:xfrm>
-          <a:prstGeom prst="rect">
-            <a:avLst/>
-          </a:prstGeom>
-          <a:noFill/>
-        </p:spPr>
-        <p:txBody>
-          <a:bodyPr wrap="square" lIns="0" rIns="0" tIns="0" bIns="0">
-            <a:spAutoFit/>
-          </a:bodyPr>
-          <a:lstStyle/>
-          <a:p>
-            <a:pPr algn="l">
-              <a:lnSpc>
-                <a:spcPct val="118000"/>
-              </a:lnSpc>
-              <a:spcAft>
-                <a:spcPts val="0"/>
-              </a:spcAft>
-            </a:pPr>
-            <a:r>
-              <a:rPr sz="1500" b="0">
-                <a:solidFill>
-                  <a:srgbClr val="5C6B62"/>
-                </a:solidFill>
-                <a:latin typeface="Arial"/>
-              </a:rPr>
-              <a:t>Figure 3.  The path as built, from a camera in a crop row to a checkpoint on the cluster. Every stage has run. Three qualifications ride on it. The collector and trainer are paused after a stop-loss on 2026-08-29. The supervisor is advisory and nothing it says is applied. And the last link is not closed: no robot frame has entered training, because none of them is labelled yet.</a:t>
-            </a:r>
-          </a:p>
-        </p:txBody>
-      </p:sp>
-      <p:sp>
-        <p:nvSpPr>
-          <p:cNvPr id="52" name="TextBox 51"/>
-          <p:cNvSpPr txBox="1"/>
-          <p:nvPr/>
-        </p:nvSpPr>
-        <p:spPr>
-          <a:xfrm>
-            <a:off x="22677120" y="23000716"/>
+            <a:off x="22677120" y="27834336"/>
             <a:ext cx="20482560" cy="365760"/>
           </a:xfrm>
           <a:prstGeom prst="rect">
@@ -5201,69 +5537,27 @@
                 </a:solidFill>
                 <a:latin typeface="Arial"/>
               </a:rPr>
-              <a:t>Every stage from a camera in a crop row to a checkpoint on the cluster has run. The dashboard and registry run on a lab server; GPU jobs queue on PSC Bridges-2. The collector and trainer are paused after a stop-loss on 2026-08-29. The supervisor is advisory and nothing it says is applied.</a:t>
-            </a:r>
-          </a:p>
-        </p:txBody>
-      </p:sp>
-      <p:sp>
-        <p:nvSpPr>
-          <p:cNvPr id="53" name="TextBox 52"/>
-          <p:cNvSpPr txBox="1"/>
-          <p:nvPr/>
-        </p:nvSpPr>
-        <p:spPr>
-          <a:xfrm>
-            <a:off x="22677120" y="24078184"/>
-            <a:ext cx="20482560" cy="365760"/>
-          </a:xfrm>
-          <a:prstGeom prst="rect">
-            <a:avLst/>
-          </a:prstGeom>
-          <a:noFill/>
-        </p:spPr>
-        <p:txBody>
-          <a:bodyPr wrap="square" lIns="0" rIns="0" tIns="0" bIns="0">
-            <a:spAutoFit/>
-          </a:bodyPr>
-          <a:lstStyle/>
-          <a:p>
-            <a:pPr algn="l">
-              <a:lnSpc>
-                <a:spcPct val="95000"/>
-              </a:lnSpc>
-              <a:spcAft>
-                <a:spcPts val="0"/>
-              </a:spcAft>
-            </a:pPr>
-            <a:r>
-              <a:rPr sz="3200" b="1">
-                <a:solidFill>
-                  <a:srgbClr val="1F3D2B"/>
-                </a:solidFill>
-                <a:latin typeface="Arial"/>
-              </a:rPr>
-              <a:t>Only one robot has the button</a:t>
-            </a:r>
-          </a:p>
-        </p:txBody>
-      </p:sp>
-      <p:sp>
-        <p:nvSpPr>
-          <p:cNvPr id="54" name="Rectangle 53"/>
+              <a:t>A language model decides what the collector goes after next, judges whether a candidate dataset is on topic, and reviews a finished step. Those run on the cluster, as batch jobs, on open weights. The lab box hosts only the small guide model, and a verdict produced there is marked in its own record as a draft that may not be reported.</a:t>
+            </a:r>
+          </a:p>
+        </p:txBody>
+      </p:sp>
+      <p:sp>
+        <p:nvSpPr>
+          <p:cNvPr id="61" name="Rectangle 60"/>
           <p:cNvSpPr/>
           <p:nvPr/>
         </p:nvSpPr>
         <p:spPr>
           <a:xfrm>
-            <a:off x="22677120" y="24606504"/>
-            <a:ext cx="20482560" cy="27432"/>
+            <a:off x="731520" y="30632400"/>
+            <a:ext cx="42428160" cy="20116"/>
           </a:xfrm>
           <a:prstGeom prst="rect">
             <a:avLst/>
           </a:prstGeom>
           <a:solidFill>
-            <a:srgbClr val="1B7A55"/>
+            <a:srgbClr val="CBD3CC"/>
           </a:solidFill>
           <a:ln>
             <a:noFill/>
@@ -5294,349 +5588,7 @@
       </p:sp>
       <p:sp>
         <p:nvSpPr>
-          <p:cNvPr id="55" name="TextBox 54"/>
-          <p:cNvSpPr txBox="1"/>
-          <p:nvPr/>
-        </p:nvSpPr>
-        <p:spPr>
-          <a:xfrm>
-            <a:off x="22677120" y="24935688"/>
-            <a:ext cx="20482560" cy="365760"/>
-          </a:xfrm>
-          <a:prstGeom prst="rect">
-            <a:avLst/>
-          </a:prstGeom>
-          <a:noFill/>
-        </p:spPr>
-        <p:txBody>
-          <a:bodyPr wrap="square" lIns="0" rIns="0" tIns="0" bIns="0">
-            <a:spAutoFit/>
-          </a:bodyPr>
-          <a:lstStyle/>
-          <a:p>
-            <a:pPr algn="l">
-              <a:lnSpc>
-                <a:spcPct val="122000"/>
-              </a:lnSpc>
-              <a:spcAft>
-                <a:spcPts val="1400"/>
-              </a:spcAft>
-            </a:pPr>
-            <a:r>
-              <a:rPr sz="1900" b="0">
-                <a:solidFill>
-                  <a:srgbClr val="1C2A22"/>
-                </a:solidFill>
-                <a:latin typeface="Arial"/>
-              </a:rPr>
-              <a:t>The Drive button appears on the 241 project and not on the laser cart's, because the allow-list holds one target. The rover has been dark since 2026-08-28: the platform answers a drive request today with its own offline page. The cart has never been drivable from the platform.</a:t>
-            </a:r>
-          </a:p>
-        </p:txBody>
-      </p:sp>
-      <p:sp>
-        <p:nvSpPr>
-          <p:cNvPr id="56" name="TextBox 55"/>
-          <p:cNvSpPr txBox="1"/>
-          <p:nvPr/>
-        </p:nvSpPr>
-        <p:spPr>
-          <a:xfrm>
-            <a:off x="22677120" y="26013156"/>
-            <a:ext cx="20482560" cy="365760"/>
-          </a:xfrm>
-          <a:prstGeom prst="rect">
-            <a:avLst/>
-          </a:prstGeom>
-          <a:noFill/>
-        </p:spPr>
-        <p:txBody>
-          <a:bodyPr wrap="square" lIns="0" rIns="0" tIns="0" bIns="0">
-            <a:spAutoFit/>
-          </a:bodyPr>
-          <a:lstStyle/>
-          <a:p>
-            <a:pPr algn="l">
-              <a:lnSpc>
-                <a:spcPct val="95000"/>
-              </a:lnSpc>
-              <a:spcAft>
-                <a:spcPts val="0"/>
-              </a:spcAft>
-            </a:pPr>
-            <a:r>
-              <a:rPr sz="3200" b="1">
-                <a:solidFill>
-                  <a:srgbClr val="1F3D2B"/>
-                </a:solidFill>
-                <a:latin typeface="Arial"/>
-              </a:rPr>
-              <a:t>Which decisions a model makes</a:t>
-            </a:r>
-          </a:p>
-        </p:txBody>
-      </p:sp>
-      <p:sp>
-        <p:nvSpPr>
-          <p:cNvPr id="57" name="Rectangle 56"/>
-          <p:cNvSpPr/>
-          <p:nvPr/>
-        </p:nvSpPr>
-        <p:spPr>
-          <a:xfrm>
-            <a:off x="22677120" y="26541476"/>
-            <a:ext cx="20482560" cy="27432"/>
-          </a:xfrm>
-          <a:prstGeom prst="rect">
-            <a:avLst/>
-          </a:prstGeom>
-          <a:solidFill>
-            <a:srgbClr val="1B7A55"/>
-          </a:solidFill>
-          <a:ln>
-            <a:noFill/>
-          </a:ln>
-          <a:effectLst/>
-        </p:spPr>
-        <p:style>
-          <a:lnRef idx="1">
-            <a:schemeClr val="accent1"/>
-          </a:lnRef>
-          <a:fillRef idx="3">
-            <a:schemeClr val="accent1"/>
-          </a:fillRef>
-          <a:effectRef idx="2">
-            <a:schemeClr val="accent1"/>
-          </a:effectRef>
-          <a:fontRef idx="minor">
-            <a:schemeClr val="lt1"/>
-          </a:fontRef>
-        </p:style>
-        <p:txBody>
-          <a:bodyPr rtlCol="0" anchor="ctr"/>
-          <a:lstStyle/>
-          <a:p>
-            <a:pPr algn="ctr"/>
-          </a:p>
-        </p:txBody>
-      </p:sp>
-      <p:sp>
-        <p:nvSpPr>
-          <p:cNvPr id="58" name="TextBox 57"/>
-          <p:cNvSpPr txBox="1"/>
-          <p:nvPr/>
-        </p:nvSpPr>
-        <p:spPr>
-          <a:xfrm>
-            <a:off x="22677120" y="26870660"/>
-            <a:ext cx="20482560" cy="365760"/>
-          </a:xfrm>
-          <a:prstGeom prst="rect">
-            <a:avLst/>
-          </a:prstGeom>
-          <a:noFill/>
-        </p:spPr>
-        <p:txBody>
-          <a:bodyPr wrap="square" lIns="0" rIns="0" tIns="0" bIns="0">
-            <a:spAutoFit/>
-          </a:bodyPr>
-          <a:lstStyle/>
-          <a:p>
-            <a:pPr algn="l">
-              <a:lnSpc>
-                <a:spcPct val="122000"/>
-              </a:lnSpc>
-              <a:spcAft>
-                <a:spcPts val="1400"/>
-              </a:spcAft>
-            </a:pPr>
-            <a:r>
-              <a:rPr sz="1900" b="0">
-                <a:solidFill>
-                  <a:srgbClr val="1C2A22"/>
-                </a:solidFill>
-                <a:latin typeface="Arial"/>
-              </a:rPr>
-              <a:t>A language model decides what the collector goes after next, judges whether a candidate dataset is on topic, and reviews a finished step. Those run on the cluster, as batch jobs, on open weights. The lab box hosts only the small guide model, and a verdict produced there is marked in its own record as a draft that may not be reported.</a:t>
-            </a:r>
-          </a:p>
-        </p:txBody>
-      </p:sp>
-      <p:sp>
-        <p:nvSpPr>
-          <p:cNvPr id="59" name="TextBox 58"/>
-          <p:cNvSpPr txBox="1"/>
-          <p:nvPr/>
-        </p:nvSpPr>
-        <p:spPr>
-          <a:xfrm>
-            <a:off x="22677120" y="27948128"/>
-            <a:ext cx="20482560" cy="365760"/>
-          </a:xfrm>
-          <a:prstGeom prst="rect">
-            <a:avLst/>
-          </a:prstGeom>
-          <a:noFill/>
-        </p:spPr>
-        <p:txBody>
-          <a:bodyPr wrap="square" lIns="0" rIns="0" tIns="0" bIns="0">
-            <a:spAutoFit/>
-          </a:bodyPr>
-          <a:lstStyle/>
-          <a:p>
-            <a:pPr algn="l">
-              <a:lnSpc>
-                <a:spcPct val="95000"/>
-              </a:lnSpc>
-              <a:spcAft>
-                <a:spcPts val="0"/>
-              </a:spcAft>
-            </a:pPr>
-            <a:r>
-              <a:rPr sz="3200" b="1">
-                <a:solidFill>
-                  <a:srgbClr val="1F3D2B"/>
-                </a:solidFill>
-                <a:latin typeface="Arial"/>
-              </a:rPr>
-              <a:t>Any research field is a project</a:t>
-            </a:r>
-          </a:p>
-        </p:txBody>
-      </p:sp>
-      <p:sp>
-        <p:nvSpPr>
-          <p:cNvPr id="60" name="Rectangle 59"/>
-          <p:cNvSpPr/>
-          <p:nvPr/>
-        </p:nvSpPr>
-        <p:spPr>
-          <a:xfrm>
-            <a:off x="22677120" y="28476448"/>
-            <a:ext cx="20482560" cy="27432"/>
-          </a:xfrm>
-          <a:prstGeom prst="rect">
-            <a:avLst/>
-          </a:prstGeom>
-          <a:solidFill>
-            <a:srgbClr val="1B7A55"/>
-          </a:solidFill>
-          <a:ln>
-            <a:noFill/>
-          </a:ln>
-          <a:effectLst/>
-        </p:spPr>
-        <p:style>
-          <a:lnRef idx="1">
-            <a:schemeClr val="accent1"/>
-          </a:lnRef>
-          <a:fillRef idx="3">
-            <a:schemeClr val="accent1"/>
-          </a:fillRef>
-          <a:effectRef idx="2">
-            <a:schemeClr val="accent1"/>
-          </a:effectRef>
-          <a:fontRef idx="minor">
-            <a:schemeClr val="lt1"/>
-          </a:fontRef>
-        </p:style>
-        <p:txBody>
-          <a:bodyPr rtlCol="0" anchor="ctr"/>
-          <a:lstStyle/>
-          <a:p>
-            <a:pPr algn="ctr"/>
-          </a:p>
-        </p:txBody>
-      </p:sp>
-      <p:sp>
-        <p:nvSpPr>
-          <p:cNvPr id="61" name="TextBox 60"/>
-          <p:cNvSpPr txBox="1"/>
-          <p:nvPr/>
-        </p:nvSpPr>
-        <p:spPr>
-          <a:xfrm>
-            <a:off x="22677120" y="28805632"/>
-            <a:ext cx="20482560" cy="365760"/>
-          </a:xfrm>
-          <a:prstGeom prst="rect">
-            <a:avLst/>
-          </a:prstGeom>
-          <a:noFill/>
-        </p:spPr>
-        <p:txBody>
-          <a:bodyPr wrap="square" lIns="0" rIns="0" tIns="0" bIns="0">
-            <a:spAutoFit/>
-          </a:bodyPr>
-          <a:lstStyle/>
-          <a:p>
-            <a:pPr algn="l">
-              <a:lnSpc>
-                <a:spcPct val="122000"/>
-              </a:lnSpc>
-              <a:spcAft>
-                <a:spcPts val="1400"/>
-              </a:spcAft>
-            </a:pPr>
-            <a:r>
-              <a:rPr sz="1900" b="0">
-                <a:solidFill>
-                  <a:srgbClr val="1C2A22"/>
-                </a:solidFill>
-                <a:latin typeface="Arial"/>
-              </a:rPr>
-              <a:t>A lab member opens a project for any data type and any field, uploads images, video or sensor logs, and gets an automatic diagnosis before choosing what to do next. Weed detection is one project on this platform. The 241 rover, the laser cart and a Unitree humanoid each have their own.</a:t>
-            </a:r>
-          </a:p>
-        </p:txBody>
-      </p:sp>
-      <p:sp>
-        <p:nvSpPr>
-          <p:cNvPr id="62" name="Rectangle 61"/>
-          <p:cNvSpPr/>
-          <p:nvPr/>
-        </p:nvSpPr>
-        <p:spPr>
-          <a:xfrm>
-            <a:off x="731520" y="30632400"/>
-            <a:ext cx="42428160" cy="20116"/>
-          </a:xfrm>
-          <a:prstGeom prst="rect">
-            <a:avLst/>
-          </a:prstGeom>
-          <a:solidFill>
-            <a:srgbClr val="CBD3CC"/>
-          </a:solidFill>
-          <a:ln>
-            <a:noFill/>
-          </a:ln>
-          <a:effectLst/>
-        </p:spPr>
-        <p:style>
-          <a:lnRef idx="1">
-            <a:schemeClr val="accent1"/>
-          </a:lnRef>
-          <a:fillRef idx="3">
-            <a:schemeClr val="accent1"/>
-          </a:fillRef>
-          <a:effectRef idx="2">
-            <a:schemeClr val="accent1"/>
-          </a:effectRef>
-          <a:fontRef idx="minor">
-            <a:schemeClr val="lt1"/>
-          </a:fontRef>
-        </p:style>
-        <p:txBody>
-          <a:bodyPr rtlCol="0" anchor="ctr"/>
-          <a:lstStyle/>
-          <a:p>
-            <a:pPr algn="ctr"/>
-          </a:p>
-        </p:txBody>
-      </p:sp>
-      <p:sp>
-        <p:nvSpPr>
-          <p:cNvPr id="63" name="TextBox 62"/>
+          <p:cNvPr id="62" name="TextBox 61"/>
           <p:cNvSpPr txBox="1"/>
           <p:nvPr/>
         </p:nvSpPr>
@@ -5678,7 +5630,7 @@
       </p:sp>
       <p:sp>
         <p:nvSpPr>
-          <p:cNvPr id="64" name="TextBox 63"/>
+          <p:cNvPr id="63" name="TextBox 62"/>
           <p:cNvSpPr txBox="1"/>
           <p:nvPr/>
         </p:nvSpPr>
@@ -5720,7 +5672,7 @@
       </p:sp>
       <p:sp>
         <p:nvSpPr>
-          <p:cNvPr id="65" name="TextBox 64"/>
+          <p:cNvPr id="64" name="TextBox 63"/>
           <p:cNvSpPr txBox="1"/>
           <p:nvPr/>
         </p:nvSpPr>
